--- a/classes/parte-2-criptografia-aplicada/059-cifrado-autenticado-aead/clase-059-presentacion.pptx
+++ b/classes/parte-2-criptografia-aplicada/059-cifrado-autenticado-aead/clase-059-presentacion.pptx
@@ -17,6 +17,9 @@
     <p:sldId id="265" r:id="rId16"/>
     <p:sldId id="266" r:id="rId17"/>
     <p:sldId id="267" r:id="rId18"/>
+    <p:sldId id="268" r:id="rId19"/>
+    <p:sldId id="269" r:id="rId20"/>
+    <p:sldId id="270" r:id="rId21"/>
   </p:sldIdLst>
   <p:sldSz cx="9144000" cy="6858000" type="screen4x3"/>
   <p:notesSz cx="6858000" cy="9144000"/>
@@ -3198,7 +3201,7 @@
                   <a:srgbClr val="0B3D2E"/>
                 </a:solidFill>
               </a:rPr>
-              <a:t>⚠️ Errores comunes</a:t>
+              <a:t>✍️ Ejercicios</a:t>
             </a:r>
           </a:p>
         </p:txBody>
@@ -3236,67 +3239,82 @@
                   <a:srgbClr val="22282E"/>
                 </a:solidFill>
               </a:rPr>
-              <a:t>•  InvalidTag inesperado — Nonce/AAD/clave distintos entre cifrado y descifrado</a:t>
-            </a:r>
-          </a:p>
-          <a:p>
-            <a:pPr>
-              <a:spcAft>
-                <a:spcPts val="600"/>
-              </a:spcAft>
-            </a:pPr>
-            <a:r>
-              <a:rPr sz="1500">
-                <a:solidFill>
-                  <a:srgbClr val="22282E"/>
-                </a:solidFill>
-              </a:rPr>
-              <a:t>•  Nonce reutilizado en GCM — Rompe confidencialidad e integridad; usa nonce único</a:t>
-            </a:r>
-          </a:p>
-          <a:p>
-            <a:pPr>
-              <a:spcAft>
-                <a:spcPts val="600"/>
-              </a:spcAft>
-            </a:pPr>
-            <a:r>
-              <a:rPr sz="1500">
-                <a:solidFill>
-                  <a:srgbClr val="22282E"/>
-                </a:solidFill>
-              </a:rPr>
-              <a:t>•  Ignorar el resultado de decrypt — Nunca uses datos sin verificar el tag</a:t>
-            </a:r>
-          </a:p>
-          <a:p>
-            <a:pPr>
-              <a:spcAft>
-                <a:spcPts val="600"/>
-              </a:spcAft>
-            </a:pPr>
-            <a:r>
-              <a:rPr sz="1500">
-                <a:solidFill>
-                  <a:srgbClr val="22282E"/>
-                </a:solidFill>
-              </a:rPr>
-              <a:t>•  Cifrar con CBC sin MAC "porque es más simple" — Inseguro; usa AEAD</a:t>
-            </a:r>
-          </a:p>
-          <a:p>
-            <a:pPr>
-              <a:spcAft>
-                <a:spcPts val="600"/>
-              </a:spcAft>
-            </a:pPr>
-            <a:r>
-              <a:rPr sz="1500">
-                <a:solidFill>
-                  <a:srgbClr val="22282E"/>
-                </a:solidFill>
-              </a:rPr>
-              <a:t>•  Nonce derivado predeciblemente — Usa CSPRNG o contador estrictamente único</a:t>
+              <a:t>•  Explica qué aporta AEAD frente a "cifrar y luego HMAC" hecho a mano.</a:t>
+            </a:r>
+          </a:p>
+          <a:p>
+            <a:pPr>
+              <a:spcAft>
+                <a:spcPts val="600"/>
+              </a:spcAft>
+            </a:pPr>
+            <a:r>
+              <a:rPr sz="1500">
+                <a:solidFill>
+                  <a:srgbClr val="22282E"/>
+                </a:solidFill>
+              </a:rPr>
+              <a:t>•  Cifra con AAD y demuestra que alterar el AAD invalida el descifrado.</a:t>
+            </a:r>
+          </a:p>
+          <a:p>
+            <a:pPr>
+              <a:spcAft>
+                <a:spcPts val="600"/>
+              </a:spcAft>
+            </a:pPr>
+            <a:r>
+              <a:rPr sz="1500">
+                <a:solidFill>
+                  <a:srgbClr val="22282E"/>
+                </a:solidFill>
+              </a:rPr>
+              <a:t>•  Investiga por qué la reutilización de nonce rompe GCM más que CTR.</a:t>
+            </a:r>
+          </a:p>
+          <a:p>
+            <a:pPr>
+              <a:spcAft>
+                <a:spcPts val="600"/>
+              </a:spcAft>
+            </a:pPr>
+            <a:r>
+              <a:rPr sz="1500">
+                <a:solidFill>
+                  <a:srgbClr val="22282E"/>
+                </a:solidFill>
+              </a:rPr>
+              <a:t>•  Compara el rendimiento de AES-GCM y ChaCha20-Poly1305 en tu CPU.</a:t>
+            </a:r>
+          </a:p>
+          <a:p>
+            <a:pPr>
+              <a:spcAft>
+                <a:spcPts val="600"/>
+              </a:spcAft>
+            </a:pPr>
+            <a:r>
+              <a:rPr sz="1500">
+                <a:solidFill>
+                  <a:srgbClr val="22282E"/>
+                </a:solidFill>
+              </a:rPr>
+              <a:t>•  Diseña un formato de mensaje nonce || ciphertext || tag autoexplicativo.</a:t>
+            </a:r>
+          </a:p>
+          <a:p>
+            <a:pPr>
+              <a:spcAft>
+                <a:spcPts val="600"/>
+              </a:spcAft>
+            </a:pPr>
+            <a:r>
+              <a:rPr sz="1500">
+                <a:solidFill>
+                  <a:srgbClr val="22282E"/>
+                </a:solidFill>
+              </a:rPr>
+              <a:t>•  Explica cómo AEAD previene el padding oracle de la clase 060.</a:t>
             </a:r>
           </a:p>
         </p:txBody>
@@ -3347,7 +3365,7 @@
                   <a:srgbClr val="0B3D2E"/>
                 </a:solidFill>
               </a:rPr>
-              <a:t>❓ Preguntas frecuentes</a:t>
+              <a:t>📝 Reto verificable</a:t>
             </a:r>
           </a:p>
         </p:txBody>
@@ -3385,82 +3403,7 @@
                   <a:srgbClr val="22282E"/>
                 </a:solidFill>
               </a:rPr>
-              <a:t>•  ❓ ¿AES-GCM o ChaCha20-Poly1305?</a:t>
-            </a:r>
-          </a:p>
-          <a:p>
-            <a:pPr>
-              <a:spcAft>
-                <a:spcPts val="600"/>
-              </a:spcAft>
-            </a:pPr>
-            <a:r>
-              <a:rPr sz="1500">
-                <a:solidFill>
-                  <a:srgbClr val="22282E"/>
-                </a:solidFill>
-              </a:rPr>
-              <a:t>•  AES-GCM con AES-NI (servidores modernos); ChaCha20-Poly1305 en móviles/embebidos o sin aceleración. Ambos son AEAD estándar.</a:t>
-            </a:r>
-          </a:p>
-          <a:p>
-            <a:pPr>
-              <a:spcAft>
-                <a:spcPts val="600"/>
-              </a:spcAft>
-            </a:pPr>
-            <a:r>
-              <a:rPr sz="1500">
-                <a:solidFill>
-                  <a:srgbClr val="22282E"/>
-                </a:solidFill>
-              </a:rPr>
-              <a:t>•  ❓ ¿Qué pongo en el AAD?</a:t>
-            </a:r>
-          </a:p>
-          <a:p>
-            <a:pPr>
-              <a:spcAft>
-                <a:spcPts val="600"/>
-              </a:spcAft>
-            </a:pPr>
-            <a:r>
-              <a:rPr sz="1500">
-                <a:solidFill>
-                  <a:srgbClr val="22282E"/>
-                </a:solidFill>
-              </a:rPr>
-              <a:t>•  Metadatos que deban ser auténticos pero no secretos: cabeceras, versiones, identificadores de contexto.</a:t>
-            </a:r>
-          </a:p>
-          <a:p>
-            <a:pPr>
-              <a:spcAft>
-                <a:spcPts val="600"/>
-              </a:spcAft>
-            </a:pPr>
-            <a:r>
-              <a:rPr sz="1500">
-                <a:solidFill>
-                  <a:srgbClr val="22282E"/>
-                </a:solidFill>
-              </a:rPr>
-              <a:t>•  ❓ ¿Cuántos mensajes puedo cifrar con una clave GCM?</a:t>
-            </a:r>
-          </a:p>
-          <a:p>
-            <a:pPr>
-              <a:spcAft>
-                <a:spcPts val="600"/>
-              </a:spcAft>
-            </a:pPr>
-            <a:r>
-              <a:rPr sz="1500">
-                <a:solidFill>
-                  <a:srgbClr val="22282E"/>
-                </a:solidFill>
-              </a:rPr>
-              <a:t>•  Limitado por el riesgo de colisión de nonces (con nonces aleatorios de 96 bits, rota la clave antes de ~2³² mensajes). Considera nonces por contador.</a:t>
+              <a:t>•  Implementa un contenedor cifrado de archivos con AES-GCM que incluya en el AAD metadatos (nombre y versión) y verifique integridad al abrir. Criterio de aceptación: el archivo se descifra solo con el…</a:t>
             </a:r>
           </a:p>
         </p:txBody>
@@ -3511,7 +3454,7 @@
                   <a:srgbClr val="0B3D2E"/>
                 </a:solidFill>
               </a:rPr>
-              <a:t>🔗 Referencias</a:t>
+              <a:t>⚠️ Errores comunes</a:t>
             </a:r>
           </a:p>
         </p:txBody>
@@ -3549,6 +3492,319 @@
                   <a:srgbClr val="22282E"/>
                 </a:solidFill>
               </a:rPr>
+              <a:t>•  InvalidTag inesperado — Nonce/AAD/clave distintos entre cifrado y descifrado</a:t>
+            </a:r>
+          </a:p>
+          <a:p>
+            <a:pPr>
+              <a:spcAft>
+                <a:spcPts val="600"/>
+              </a:spcAft>
+            </a:pPr>
+            <a:r>
+              <a:rPr sz="1500">
+                <a:solidFill>
+                  <a:srgbClr val="22282E"/>
+                </a:solidFill>
+              </a:rPr>
+              <a:t>•  Nonce reutilizado en GCM — Rompe confidencialidad e integridad; usa nonce único</a:t>
+            </a:r>
+          </a:p>
+          <a:p>
+            <a:pPr>
+              <a:spcAft>
+                <a:spcPts val="600"/>
+              </a:spcAft>
+            </a:pPr>
+            <a:r>
+              <a:rPr sz="1500">
+                <a:solidFill>
+                  <a:srgbClr val="22282E"/>
+                </a:solidFill>
+              </a:rPr>
+              <a:t>•  Ignorar el resultado de decrypt — Nunca uses datos sin verificar el tag</a:t>
+            </a:r>
+          </a:p>
+          <a:p>
+            <a:pPr>
+              <a:spcAft>
+                <a:spcPts val="600"/>
+              </a:spcAft>
+            </a:pPr>
+            <a:r>
+              <a:rPr sz="1500">
+                <a:solidFill>
+                  <a:srgbClr val="22282E"/>
+                </a:solidFill>
+              </a:rPr>
+              <a:t>•  Cifrar con CBC sin MAC "porque es más simple" — Inseguro; usa AEAD</a:t>
+            </a:r>
+          </a:p>
+          <a:p>
+            <a:pPr>
+              <a:spcAft>
+                <a:spcPts val="600"/>
+              </a:spcAft>
+            </a:pPr>
+            <a:r>
+              <a:rPr sz="1500">
+                <a:solidFill>
+                  <a:srgbClr val="22282E"/>
+                </a:solidFill>
+              </a:rPr>
+              <a:t>•  Nonce derivado predeciblemente — Usa CSPRNG o contador estrictamente único</a:t>
+            </a:r>
+          </a:p>
+        </p:txBody>
+      </p:sp>
+    </p:spTree>
+  </p:cSld>
+  <p:clrMapOvr>
+    <a:masterClrMapping/>
+  </p:clrMapOvr>
+</p:sld>
+</file>
+
+<file path=ppt/slides/slide13.xml><?xml version="1.0" encoding="utf-8"?>
+<p:sld xmlns:a="http://schemas.openxmlformats.org/drawingml/2006/main" xmlns:p="http://schemas.openxmlformats.org/presentationml/2006/main" xmlns:r="http://schemas.openxmlformats.org/officeDocument/2006/relationships">
+  <p:cSld>
+    <p:spTree>
+      <p:nvGrpSpPr>
+        <p:cNvPr id="1" name=""/>
+        <p:cNvGrpSpPr/>
+        <p:nvPr/>
+      </p:nvGrpSpPr>
+      <p:grpSpPr/>
+      <p:sp>
+        <p:nvSpPr>
+          <p:cNvPr id="2" name="TextBox 1"/>
+          <p:cNvSpPr txBox="1"/>
+          <p:nvPr/>
+        </p:nvSpPr>
+        <p:spPr>
+          <a:xfrm>
+            <a:off x="457200" y="320040"/>
+            <a:ext cx="8229600" cy="822960"/>
+          </a:xfrm>
+          <a:prstGeom prst="rect">
+            <a:avLst/>
+          </a:prstGeom>
+          <a:noFill/>
+        </p:spPr>
+        <p:txBody>
+          <a:bodyPr wrap="square">
+            <a:spAutoFit/>
+          </a:bodyPr>
+          <a:lstStyle/>
+          <a:p>
+            <a:r>
+              <a:rPr sz="2600" b="1">
+                <a:solidFill>
+                  <a:srgbClr val="0B3D2E"/>
+                </a:solidFill>
+              </a:rPr>
+              <a:t>❓ Preguntas frecuentes</a:t>
+            </a:r>
+          </a:p>
+        </p:txBody>
+      </p:sp>
+      <p:sp>
+        <p:nvSpPr>
+          <p:cNvPr id="3" name="TextBox 2"/>
+          <p:cNvSpPr txBox="1"/>
+          <p:nvPr/>
+        </p:nvSpPr>
+        <p:spPr>
+          <a:xfrm>
+            <a:off x="457200" y="1280160"/>
+            <a:ext cx="8229600" cy="4937760"/>
+          </a:xfrm>
+          <a:prstGeom prst="rect">
+            <a:avLst/>
+          </a:prstGeom>
+          <a:noFill/>
+        </p:spPr>
+        <p:txBody>
+          <a:bodyPr wrap="square">
+            <a:spAutoFit/>
+          </a:bodyPr>
+          <a:lstStyle/>
+          <a:p>
+            <a:pPr>
+              <a:spcAft>
+                <a:spcPts val="600"/>
+              </a:spcAft>
+            </a:pPr>
+            <a:r>
+              <a:rPr sz="1500">
+                <a:solidFill>
+                  <a:srgbClr val="22282E"/>
+                </a:solidFill>
+              </a:rPr>
+              <a:t>•  ❓ ¿AES-GCM o ChaCha20-Poly1305?</a:t>
+            </a:r>
+          </a:p>
+          <a:p>
+            <a:pPr>
+              <a:spcAft>
+                <a:spcPts val="600"/>
+              </a:spcAft>
+            </a:pPr>
+            <a:r>
+              <a:rPr sz="1500">
+                <a:solidFill>
+                  <a:srgbClr val="22282E"/>
+                </a:solidFill>
+              </a:rPr>
+              <a:t>•  AES-GCM con AES-NI (servidores modernos); ChaCha20-Poly1305 en móviles/embebidos o sin aceleración. Ambos son AEAD estándar.</a:t>
+            </a:r>
+          </a:p>
+          <a:p>
+            <a:pPr>
+              <a:spcAft>
+                <a:spcPts val="600"/>
+              </a:spcAft>
+            </a:pPr>
+            <a:r>
+              <a:rPr sz="1500">
+                <a:solidFill>
+                  <a:srgbClr val="22282E"/>
+                </a:solidFill>
+              </a:rPr>
+              <a:t>•  ❓ ¿Qué pongo en el AAD?</a:t>
+            </a:r>
+          </a:p>
+          <a:p>
+            <a:pPr>
+              <a:spcAft>
+                <a:spcPts val="600"/>
+              </a:spcAft>
+            </a:pPr>
+            <a:r>
+              <a:rPr sz="1500">
+                <a:solidFill>
+                  <a:srgbClr val="22282E"/>
+                </a:solidFill>
+              </a:rPr>
+              <a:t>•  Metadatos que deban ser auténticos pero no secretos: cabeceras, versiones, identificadores de contexto.</a:t>
+            </a:r>
+          </a:p>
+          <a:p>
+            <a:pPr>
+              <a:spcAft>
+                <a:spcPts val="600"/>
+              </a:spcAft>
+            </a:pPr>
+            <a:r>
+              <a:rPr sz="1500">
+                <a:solidFill>
+                  <a:srgbClr val="22282E"/>
+                </a:solidFill>
+              </a:rPr>
+              <a:t>•  ❓ ¿Cuántos mensajes puedo cifrar con una clave GCM?</a:t>
+            </a:r>
+          </a:p>
+          <a:p>
+            <a:pPr>
+              <a:spcAft>
+                <a:spcPts val="600"/>
+              </a:spcAft>
+            </a:pPr>
+            <a:r>
+              <a:rPr sz="1500">
+                <a:solidFill>
+                  <a:srgbClr val="22282E"/>
+                </a:solidFill>
+              </a:rPr>
+              <a:t>•  Limitado por el riesgo de colisión de nonces (con nonces aleatorios de 96 bits, rota la clave antes de ~2³² mensajes). Considera nonces por contador.</a:t>
+            </a:r>
+          </a:p>
+        </p:txBody>
+      </p:sp>
+    </p:spTree>
+  </p:cSld>
+  <p:clrMapOvr>
+    <a:masterClrMapping/>
+  </p:clrMapOvr>
+</p:sld>
+</file>
+
+<file path=ppt/slides/slide14.xml><?xml version="1.0" encoding="utf-8"?>
+<p:sld xmlns:a="http://schemas.openxmlformats.org/drawingml/2006/main" xmlns:p="http://schemas.openxmlformats.org/presentationml/2006/main" xmlns:r="http://schemas.openxmlformats.org/officeDocument/2006/relationships">
+  <p:cSld>
+    <p:spTree>
+      <p:nvGrpSpPr>
+        <p:cNvPr id="1" name=""/>
+        <p:cNvGrpSpPr/>
+        <p:nvPr/>
+      </p:nvGrpSpPr>
+      <p:grpSpPr/>
+      <p:sp>
+        <p:nvSpPr>
+          <p:cNvPr id="2" name="TextBox 1"/>
+          <p:cNvSpPr txBox="1"/>
+          <p:nvPr/>
+        </p:nvSpPr>
+        <p:spPr>
+          <a:xfrm>
+            <a:off x="457200" y="320040"/>
+            <a:ext cx="8229600" cy="822960"/>
+          </a:xfrm>
+          <a:prstGeom prst="rect">
+            <a:avLst/>
+          </a:prstGeom>
+          <a:noFill/>
+        </p:spPr>
+        <p:txBody>
+          <a:bodyPr wrap="square">
+            <a:spAutoFit/>
+          </a:bodyPr>
+          <a:lstStyle/>
+          <a:p>
+            <a:r>
+              <a:rPr sz="2600" b="1">
+                <a:solidFill>
+                  <a:srgbClr val="0B3D2E"/>
+                </a:solidFill>
+              </a:rPr>
+              <a:t>🔗 Referencias</a:t>
+            </a:r>
+          </a:p>
+        </p:txBody>
+      </p:sp>
+      <p:sp>
+        <p:nvSpPr>
+          <p:cNvPr id="3" name="TextBox 2"/>
+          <p:cNvSpPr txBox="1"/>
+          <p:nvPr/>
+        </p:nvSpPr>
+        <p:spPr>
+          <a:xfrm>
+            <a:off x="457200" y="1280160"/>
+            <a:ext cx="8229600" cy="4937760"/>
+          </a:xfrm>
+          <a:prstGeom prst="rect">
+            <a:avLst/>
+          </a:prstGeom>
+          <a:noFill/>
+        </p:spPr>
+        <p:txBody>
+          <a:bodyPr wrap="square">
+            <a:spAutoFit/>
+          </a:bodyPr>
+          <a:lstStyle/>
+          <a:p>
+            <a:pPr>
+              <a:spcAft>
+                <a:spcPts val="600"/>
+              </a:spcAft>
+            </a:pPr>
+            <a:r>
+              <a:rPr sz="1500">
+                <a:solidFill>
+                  <a:srgbClr val="22282E"/>
+                </a:solidFill>
+              </a:rPr>
               <a:t>•  IETF RFC 5116 (AEAD) — &lt;https://www.rfc-editor.org/rfc/rfc5116&gt;</a:t>
             </a:r>
           </a:p>
@@ -3599,6 +3855,81 @@
           </a:p>
         </p:txBody>
       </p:sp>
+    </p:spTree>
+  </p:cSld>
+  <p:clrMapOvr>
+    <a:masterClrMapping/>
+  </p:clrMapOvr>
+</p:sld>
+</file>
+
+<file path=ppt/slides/slide15.xml><?xml version="1.0" encoding="utf-8"?>
+<p:sld xmlns:a="http://schemas.openxmlformats.org/drawingml/2006/main" xmlns:p="http://schemas.openxmlformats.org/presentationml/2006/main" xmlns:r="http://schemas.openxmlformats.org/officeDocument/2006/relationships">
+  <p:cSld>
+    <p:spTree>
+      <p:nvGrpSpPr>
+        <p:cNvPr id="1" name=""/>
+        <p:cNvGrpSpPr/>
+        <p:nvPr/>
+      </p:nvGrpSpPr>
+      <p:grpSpPr/>
+      <p:sp>
+        <p:nvSpPr>
+          <p:cNvPr id="2" name="TextBox 1"/>
+          <p:cNvSpPr txBox="1"/>
+          <p:nvPr/>
+        </p:nvSpPr>
+        <p:spPr>
+          <a:xfrm>
+            <a:off x="457200" y="274320"/>
+            <a:ext cx="8229600" cy="640080"/>
+          </a:xfrm>
+          <a:prstGeom prst="rect">
+            <a:avLst/>
+          </a:prstGeom>
+          <a:noFill/>
+        </p:spPr>
+        <p:txBody>
+          <a:bodyPr wrap="square">
+            <a:spAutoFit/>
+          </a:bodyPr>
+          <a:lstStyle/>
+          <a:p>
+            <a:r>
+              <a:rPr sz="2200" b="1">
+                <a:solidFill>
+                  <a:srgbClr val="0B3D2E"/>
+                </a:solidFill>
+              </a:rPr>
+              <a:t>Diagrama de la clase</a:t>
+            </a:r>
+          </a:p>
+        </p:txBody>
+      </p:sp>
+      <p:pic>
+        <p:nvPicPr>
+          <p:cNvPr id="3" name="Picture 2" descr="3275a789d888bc6d.png"/>
+          <p:cNvPicPr>
+            <a:picLocks noChangeAspect="1"/>
+          </p:cNvPicPr>
+          <p:nvPr/>
+        </p:nvPicPr>
+        <p:blipFill>
+          <a:blip r:embed="rId2"/>
+          <a:stretch>
+            <a:fillRect/>
+          </a:stretch>
+        </p:blipFill>
+        <p:spPr>
+          <a:xfrm>
+            <a:off x="457200" y="2468880"/>
+            <a:ext cx="8229600" cy="2560320"/>
+          </a:xfrm>
+          <a:prstGeom prst="rect">
+            <a:avLst/>
+          </a:prstGeom>
+        </p:spPr>
+      </p:pic>
     </p:spTree>
   </p:cSld>
   <p:clrMapOvr>
@@ -3683,7 +4014,7 @@
                   <a:srgbClr val="22282E"/>
                 </a:solidFill>
               </a:rPr>
-              <a:t>•  Consolidar la lección central de la criptografía aplicada moderna: nunca cifres sin autenticar. El alumno aprenderá qué es el cifrado autenticado con datos asociados (AEAD), cómo AES-GCM y ChaCha20-Poly1305 combinan confidencialidad e integridad en una sola primitiva, qué son los "datos asociados" (AAD), y por qué AEAD es la respuesta directa a los ataques de padding oracle y manipulación de la clase 060.</a:t>
+              <a:t>•  Consolidar la lección central de la criptografía aplicada moderna: nunca cifres sin autenticar. El alumno aprenderá qué es el cifrado autenticado con datos asociados (AEAD), cómo AES-GCM y…</a:t>
             </a:r>
           </a:p>
         </p:txBody>
@@ -4077,7 +4408,7 @@
                   <a:srgbClr val="0B3D2E"/>
                 </a:solidFill>
               </a:rPr>
-              <a:t>📖 Definiciones y características</a:t>
+              <a:t>🧠 Explicación en profundidad</a:t>
             </a:r>
           </a:p>
         </p:txBody>
@@ -4115,97 +4446,97 @@
                   <a:srgbClr val="22282E"/>
                 </a:solidFill>
               </a:rPr>
-              <a:t>•  AEAD: cifrado que produce texto cifrado + tag de autenticación en una sola operación. Característica: confidencialidad e integridad garantizadas juntas.</a:t>
-            </a:r>
-          </a:p>
-          <a:p>
-            <a:pPr>
-              <a:spcAft>
-                <a:spcPts val="600"/>
-              </a:spcAft>
-            </a:pPr>
-            <a:r>
-              <a:rPr sz="1500">
-                <a:solidFill>
-                  <a:srgbClr val="22282E"/>
-                </a:solidFill>
-              </a:rPr>
-              <a:t>•  AES-GCM: AES en modo Galois/Counter; muy rápido con AES-NI. Sensible a la reutilización de nonce (rompe la autenticación).</a:t>
-            </a:r>
-          </a:p>
-          <a:p>
-            <a:pPr>
-              <a:spcAft>
-                <a:spcPts val="600"/>
-              </a:spcAft>
-            </a:pPr>
-            <a:r>
-              <a:rPr sz="1500">
-                <a:solidFill>
-                  <a:srgbClr val="22282E"/>
-                </a:solidFill>
-              </a:rPr>
-              <a:t>•  ChaCha20-Poly1305: AEAD que combina el cifrado de flujo ChaCha20 con el MAC Poly1305; ideal sin aceleración hardware.</a:t>
-            </a:r>
-          </a:p>
-          <a:p>
-            <a:pPr>
-              <a:spcAft>
-                <a:spcPts val="600"/>
-              </a:spcAft>
-            </a:pPr>
-            <a:r>
-              <a:rPr sz="1500">
-                <a:solidFill>
-                  <a:srgbClr val="22282E"/>
-                </a:solidFill>
-              </a:rPr>
-              <a:t>•  Nonce: único por clave. En GCM/ChaCha20-Poly1305 mide 96 bits; repetirlo es catastrófico.</a:t>
-            </a:r>
-          </a:p>
-          <a:p>
-            <a:pPr>
-              <a:spcAft>
-                <a:spcPts val="600"/>
-              </a:spcAft>
-            </a:pPr>
-            <a:r>
-              <a:rPr sz="1500">
-                <a:solidFill>
-                  <a:srgbClr val="22282E"/>
-                </a:solidFill>
-              </a:rPr>
-              <a:t>•  Datos asociados (AAD): datos que se autentican pero no se cifran (cabeceras, IDs); su alteración invalida el tag.</a:t>
-            </a:r>
-          </a:p>
-          <a:p>
-            <a:pPr>
-              <a:spcAft>
-                <a:spcPts val="600"/>
-              </a:spcAft>
-            </a:pPr>
-            <a:r>
-              <a:rPr sz="1500">
-                <a:solidFill>
-                  <a:srgbClr val="22282E"/>
-                </a:solidFill>
-              </a:rPr>
-              <a:t>•  Tag de autenticación: valor (128 bits) que el receptor verifica; si no coincide, el descifrado se rechaza sin entregar datos.</a:t>
-            </a:r>
-          </a:p>
-          <a:p>
-            <a:pPr>
-              <a:spcAft>
-                <a:spcPts val="600"/>
-              </a:spcAft>
-            </a:pPr>
-            <a:r>
-              <a:rPr sz="1500">
-                <a:solidFill>
-                  <a:srgbClr val="22282E"/>
-                </a:solidFill>
-              </a:rPr>
-              <a:t>•  Fallo cerrado: ante tag inválido, la primitiva no devuelve texto plano, evitando fugas.</a:t>
+              <a:t>•  Los modos de la clase 047 dan confidencialidad: impiden leer. Ninguno impide</a:t>
+            </a:r>
+          </a:p>
+          <a:p>
+            <a:pPr>
+              <a:spcAft>
+                <a:spcPts val="600"/>
+              </a:spcAft>
+            </a:pPr>
+            <a:r>
+              <a:rPr sz="1500">
+                <a:solidFill>
+                  <a:srgbClr val="22282E"/>
+                </a:solidFill>
+              </a:rPr>
+              <a:t>•  modificar. Con CTR o con un cifrado de flujo, un atacante que sepa dónde está un campo</a:t>
+            </a:r>
+          </a:p>
+          <a:p>
+            <a:pPr>
+              <a:spcAft>
+                <a:spcPts val="600"/>
+              </a:spcAft>
+            </a:pPr>
+            <a:r>
+              <a:rPr sz="1500">
+                <a:solidFill>
+                  <a:srgbClr val="22282E"/>
+                </a:solidFill>
+              </a:rPr>
+              <a:t>•  puede voltear bits del texto cifrado y provocar cambios exactos y predecibles en el texto</a:t>
+            </a:r>
+          </a:p>
+          <a:p>
+            <a:pPr>
+              <a:spcAft>
+                <a:spcPts val="600"/>
+              </a:spcAft>
+            </a:pPr>
+            <a:r>
+              <a:rPr sz="1500">
+                <a:solidFill>
+                  <a:srgbClr val="22282E"/>
+                </a:solidFill>
+              </a:rPr>
+              <a:t>•  claro, sin conocer la clave: cambiar transferir: 100 por transferir: 900 es</a:t>
+            </a:r>
+          </a:p>
+          <a:p>
+            <a:pPr>
+              <a:spcAft>
+                <a:spcPts val="600"/>
+              </a:spcAft>
+            </a:pPr>
+            <a:r>
+              <a:rPr sz="1500">
+                <a:solidFill>
+                  <a:srgbClr val="22282E"/>
+                </a:solidFill>
+              </a:rPr>
+              <a:t>•  literalmente un XOR bien colocado. Con CBC puede alterar un bloque a costa de corromper el</a:t>
+            </a:r>
+          </a:p>
+          <a:p>
+            <a:pPr>
+              <a:spcAft>
+                <a:spcPts val="600"/>
+              </a:spcAft>
+            </a:pPr>
+            <a:r>
+              <a:rPr sz="1500">
+                <a:solidFill>
+                  <a:srgbClr val="22282E"/>
+                </a:solidFill>
+              </a:rPr>
+              <a:t>•  anterior. La conclusión es dura y merece enunciarse así: cifrado sin autenticación no es</a:t>
+            </a:r>
+          </a:p>
+          <a:p>
+            <a:pPr>
+              <a:spcAft>
+                <a:spcPts val="600"/>
+              </a:spcAft>
+            </a:pPr>
+            <a:r>
+              <a:rPr sz="1500">
+                <a:solidFill>
+                  <a:srgbClr val="22282E"/>
+                </a:solidFill>
+              </a:rPr>
+              <a:t>•  seguro en ningún escenario realista.</a:t>
             </a:r>
           </a:p>
         </p:txBody>
@@ -4256,7 +4587,7 @@
                   <a:srgbClr val="0B3D2E"/>
                 </a:solidFill>
               </a:rPr>
-              <a:t>🧰 Herramientas y preparación</a:t>
+              <a:t>📖 Definiciones y características</a:t>
             </a:r>
           </a:p>
         </p:txBody>
@@ -4294,37 +4625,97 @@
                   <a:srgbClr val="22282E"/>
                 </a:solidFill>
               </a:rPr>
-              <a:t>•  openssl version   # openssl enc -aes-256-gcm o vía API</a:t>
-            </a:r>
-          </a:p>
-          <a:p>
-            <a:pPr>
-              <a:spcAft>
-                <a:spcPts val="600"/>
-              </a:spcAft>
-            </a:pPr>
-            <a:r>
-              <a:rPr sz="1500">
-                <a:solidFill>
-                  <a:srgbClr val="22282E"/>
-                </a:solidFill>
-              </a:rPr>
-              <a:t>•  pip install cryptography</a:t>
-            </a:r>
-          </a:p>
-          <a:p>
-            <a:pPr>
-              <a:spcAft>
-                <a:spcPts val="600"/>
-              </a:spcAft>
-            </a:pPr>
-            <a:r>
-              <a:rPr sz="1500">
-                <a:solidFill>
-                  <a:srgbClr val="22282E"/>
-                </a:solidFill>
-              </a:rPr>
-              <a:t>•  Laboratorio local. Los mensajes son de prueba propios.</a:t>
+              <a:t>•  AEAD: cifrado que produce texto cifrado + tag de autenticación en una sola operación. Característica: confidencialidad e integridad garantizadas juntas.</a:t>
+            </a:r>
+          </a:p>
+          <a:p>
+            <a:pPr>
+              <a:spcAft>
+                <a:spcPts val="600"/>
+              </a:spcAft>
+            </a:pPr>
+            <a:r>
+              <a:rPr sz="1500">
+                <a:solidFill>
+                  <a:srgbClr val="22282E"/>
+                </a:solidFill>
+              </a:rPr>
+              <a:t>•  AES-GCM: AES en modo Galois/Counter; muy rápido con AES-NI. Sensible a la reutilización de nonce (rompe la autenticación).</a:t>
+            </a:r>
+          </a:p>
+          <a:p>
+            <a:pPr>
+              <a:spcAft>
+                <a:spcPts val="600"/>
+              </a:spcAft>
+            </a:pPr>
+            <a:r>
+              <a:rPr sz="1500">
+                <a:solidFill>
+                  <a:srgbClr val="22282E"/>
+                </a:solidFill>
+              </a:rPr>
+              <a:t>•  ChaCha20-Poly1305: AEAD que combina el cifrado de flujo ChaCha20 con el MAC Poly1305; ideal sin aceleración hardware.</a:t>
+            </a:r>
+          </a:p>
+          <a:p>
+            <a:pPr>
+              <a:spcAft>
+                <a:spcPts val="600"/>
+              </a:spcAft>
+            </a:pPr>
+            <a:r>
+              <a:rPr sz="1500">
+                <a:solidFill>
+                  <a:srgbClr val="22282E"/>
+                </a:solidFill>
+              </a:rPr>
+              <a:t>•  Nonce: único por clave. En GCM/ChaCha20-Poly1305 mide 96 bits; repetirlo es catastrófico.</a:t>
+            </a:r>
+          </a:p>
+          <a:p>
+            <a:pPr>
+              <a:spcAft>
+                <a:spcPts val="600"/>
+              </a:spcAft>
+            </a:pPr>
+            <a:r>
+              <a:rPr sz="1500">
+                <a:solidFill>
+                  <a:srgbClr val="22282E"/>
+                </a:solidFill>
+              </a:rPr>
+              <a:t>•  Datos asociados (AAD): datos que se autentican pero no se cifran (cabeceras, IDs); su alteración invalida el tag.</a:t>
+            </a:r>
+          </a:p>
+          <a:p>
+            <a:pPr>
+              <a:spcAft>
+                <a:spcPts val="600"/>
+              </a:spcAft>
+            </a:pPr>
+            <a:r>
+              <a:rPr sz="1500">
+                <a:solidFill>
+                  <a:srgbClr val="22282E"/>
+                </a:solidFill>
+              </a:rPr>
+              <a:t>•  Tag de autenticación: valor (128 bits) que el receptor verifica; si no coincide, el descifrado se rechaza sin entregar datos.</a:t>
+            </a:r>
+          </a:p>
+          <a:p>
+            <a:pPr>
+              <a:spcAft>
+                <a:spcPts val="600"/>
+              </a:spcAft>
+            </a:pPr>
+            <a:r>
+              <a:rPr sz="1500">
+                <a:solidFill>
+                  <a:srgbClr val="22282E"/>
+                </a:solidFill>
+              </a:rPr>
+              <a:t>•  Fallo cerrado: ante tag inválido, la primitiva no devuelve texto plano, evitando fugas.</a:t>
             </a:r>
           </a:p>
         </p:txBody>
@@ -4375,7 +4766,7 @@
                   <a:srgbClr val="0B3D2E"/>
                 </a:solidFill>
               </a:rPr>
-              <a:t>🧪 Laboratorio guiado</a:t>
+              <a:t>📔 Glosario</a:t>
             </a:r>
           </a:p>
         </p:txBody>
@@ -4413,97 +4804,97 @@
                   <a:srgbClr val="22282E"/>
                 </a:solidFill>
               </a:rPr>
-              <a:t>•  AES-GCM con AAD en Python:</a:t>
-            </a:r>
-          </a:p>
-          <a:p>
-            <a:pPr>
-              <a:spcAft>
-                <a:spcPts val="600"/>
-              </a:spcAft>
-            </a:pPr>
-            <a:r>
-              <a:rPr sz="1500">
-                <a:solidFill>
-                  <a:srgbClr val="22282E"/>
-                </a:solidFill>
-              </a:rPr>
-              <a:t>•  import os</a:t>
-            </a:r>
-          </a:p>
-          <a:p>
-            <a:pPr>
-              <a:spcAft>
-                <a:spcPts val="600"/>
-              </a:spcAft>
-            </a:pPr>
-            <a:r>
-              <a:rPr sz="1500">
-                <a:solidFill>
-                  <a:srgbClr val="22282E"/>
-                </a:solidFill>
-              </a:rPr>
-              <a:t>•  from cryptography.hazmat.primitives.ciphers.aead import AESGCM</a:t>
-            </a:r>
-          </a:p>
-          <a:p>
-            <a:pPr>
-              <a:spcAft>
-                <a:spcPts val="600"/>
-              </a:spcAft>
-            </a:pPr>
-            <a:r>
-              <a:rPr sz="1500">
-                <a:solidFill>
-                  <a:srgbClr val="22282E"/>
-                </a:solidFill>
-              </a:rPr>
-              <a:t>•  key = AESGCM.generatekey(bitlength=256)</a:t>
-            </a:r>
-          </a:p>
-          <a:p>
-            <a:pPr>
-              <a:spcAft>
-                <a:spcPts val="600"/>
-              </a:spcAft>
-            </a:pPr>
-            <a:r>
-              <a:rPr sz="1500">
-                <a:solidFill>
-                  <a:srgbClr val="22282E"/>
-                </a:solidFill>
-              </a:rPr>
-              <a:t>•  aead = AESGCM(key)</a:t>
-            </a:r>
-          </a:p>
-          <a:p>
-            <a:pPr>
-              <a:spcAft>
-                <a:spcPts val="600"/>
-              </a:spcAft>
-            </a:pPr>
-            <a:r>
-              <a:rPr sz="1500">
-                <a:solidFill>
-                  <a:srgbClr val="22282E"/>
-                </a:solidFill>
-              </a:rPr>
-              <a:t>•  nonce = os.urandom(12)</a:t>
-            </a:r>
-          </a:p>
-          <a:p>
-            <a:pPr>
-              <a:spcAft>
-                <a:spcPts val="600"/>
-              </a:spcAft>
-            </a:pPr>
-            <a:r>
-              <a:rPr sz="1500">
-                <a:solidFill>
-                  <a:srgbClr val="22282E"/>
-                </a:solidFill>
-              </a:rPr>
-              <a:t>•  aad = b"id=42;tipo=factura"</a:t>
+              <a:t>•  Término — Definición concisa</a:t>
+            </a:r>
+          </a:p>
+          <a:p>
+            <a:pPr>
+              <a:spcAft>
+                <a:spcPts val="600"/>
+              </a:spcAft>
+            </a:pPr>
+            <a:r>
+              <a:rPr sz="1500">
+                <a:solidFill>
+                  <a:srgbClr val="22282E"/>
+                </a:solidFill>
+              </a:rPr>
+              <a:t>•  AEAD — Cifrado autenticado con datos asociados</a:t>
+            </a:r>
+          </a:p>
+          <a:p>
+            <a:pPr>
+              <a:spcAft>
+                <a:spcPts val="600"/>
+              </a:spcAft>
+            </a:pPr>
+            <a:r>
+              <a:rPr sz="1500">
+                <a:solidFill>
+                  <a:srgbClr val="22282E"/>
+                </a:solidFill>
+              </a:rPr>
+              <a:t>•  Maleabilidad — Poder alterar el texto claro manipulando el cifrado</a:t>
+            </a:r>
+          </a:p>
+          <a:p>
+            <a:pPr>
+              <a:spcAft>
+                <a:spcPts val="600"/>
+              </a:spcAft>
+            </a:pPr>
+            <a:r>
+              <a:rPr sz="1500">
+                <a:solidFill>
+                  <a:srgbClr val="22282E"/>
+                </a:solidFill>
+              </a:rPr>
+              <a:t>•  Bit-flipping — Voltear bits del cifrado para cambiar el claro de forma predecible</a:t>
+            </a:r>
+          </a:p>
+          <a:p>
+            <a:pPr>
+              <a:spcAft>
+                <a:spcPts val="600"/>
+              </a:spcAft>
+            </a:pPr>
+            <a:r>
+              <a:rPr sz="1500">
+                <a:solidFill>
+                  <a:srgbClr val="22282E"/>
+                </a:solidFill>
+              </a:rPr>
+              <a:t>•  Tag de autenticación — Etiqueta que detecta cualquier manipulación</a:t>
+            </a:r>
+          </a:p>
+          <a:p>
+            <a:pPr>
+              <a:spcAft>
+                <a:spcPts val="600"/>
+              </a:spcAft>
+            </a:pPr>
+            <a:r>
+              <a:rPr sz="1500">
+                <a:solidFill>
+                  <a:srgbClr val="22282E"/>
+                </a:solidFill>
+              </a:rPr>
+              <a:t>•  AAD — Datos asociados: se autentican pero no se cifran</a:t>
+            </a:r>
+          </a:p>
+          <a:p>
+            <a:pPr>
+              <a:spcAft>
+                <a:spcPts val="600"/>
+              </a:spcAft>
+            </a:pPr>
+            <a:r>
+              <a:rPr sz="1500">
+                <a:solidFill>
+                  <a:srgbClr val="22282E"/>
+                </a:solidFill>
+              </a:rPr>
+              <a:t>•  Sustitución de contexto — Reutilizar un cifrado válido en otro lugar; el AAD lo impide</a:t>
             </a:r>
           </a:p>
         </p:txBody>
@@ -4554,7 +4945,7 @@
                   <a:srgbClr val="0B3D2E"/>
                 </a:solidFill>
               </a:rPr>
-              <a:t>✍️ Ejercicios</a:t>
+              <a:t>🧰 Herramientas y preparación</a:t>
             </a:r>
           </a:p>
         </p:txBody>
@@ -4592,82 +4983,7 @@
                   <a:srgbClr val="22282E"/>
                 </a:solidFill>
               </a:rPr>
-              <a:t>•  Explica qué aporta AEAD frente a "cifrar y luego HMAC" hecho a mano.</a:t>
-            </a:r>
-          </a:p>
-          <a:p>
-            <a:pPr>
-              <a:spcAft>
-                <a:spcPts val="600"/>
-              </a:spcAft>
-            </a:pPr>
-            <a:r>
-              <a:rPr sz="1500">
-                <a:solidFill>
-                  <a:srgbClr val="22282E"/>
-                </a:solidFill>
-              </a:rPr>
-              <a:t>•  Cifra con AAD y demuestra que alterar el AAD invalida el descifrado.</a:t>
-            </a:r>
-          </a:p>
-          <a:p>
-            <a:pPr>
-              <a:spcAft>
-                <a:spcPts val="600"/>
-              </a:spcAft>
-            </a:pPr>
-            <a:r>
-              <a:rPr sz="1500">
-                <a:solidFill>
-                  <a:srgbClr val="22282E"/>
-                </a:solidFill>
-              </a:rPr>
-              <a:t>•  Investiga por qué la reutilización de nonce rompe GCM más que CTR.</a:t>
-            </a:r>
-          </a:p>
-          <a:p>
-            <a:pPr>
-              <a:spcAft>
-                <a:spcPts val="600"/>
-              </a:spcAft>
-            </a:pPr>
-            <a:r>
-              <a:rPr sz="1500">
-                <a:solidFill>
-                  <a:srgbClr val="22282E"/>
-                </a:solidFill>
-              </a:rPr>
-              <a:t>•  Compara el rendimiento de AES-GCM y ChaCha20-Poly1305 en tu CPU.</a:t>
-            </a:r>
-          </a:p>
-          <a:p>
-            <a:pPr>
-              <a:spcAft>
-                <a:spcPts val="600"/>
-              </a:spcAft>
-            </a:pPr>
-            <a:r>
-              <a:rPr sz="1500">
-                <a:solidFill>
-                  <a:srgbClr val="22282E"/>
-                </a:solidFill>
-              </a:rPr>
-              <a:t>•  Diseña un formato de mensaje nonce || ciphertext || tag autoexplicativo.</a:t>
-            </a:r>
-          </a:p>
-          <a:p>
-            <a:pPr>
-              <a:spcAft>
-                <a:spcPts val="600"/>
-              </a:spcAft>
-            </a:pPr>
-            <a:r>
-              <a:rPr sz="1500">
-                <a:solidFill>
-                  <a:srgbClr val="22282E"/>
-                </a:solidFill>
-              </a:rPr>
-              <a:t>•  Explica cómo AEAD previene el padding oracle de la clase 060.</a:t>
+              <a:t>•  Laboratorio local. Los mensajes son de prueba propios.</a:t>
             </a:r>
           </a:p>
         </p:txBody>
@@ -4718,7 +5034,7 @@
                   <a:srgbClr val="0B3D2E"/>
                 </a:solidFill>
               </a:rPr>
-              <a:t>📝 Reto verificable</a:t>
+              <a:t>🧪 Laboratorio guiado</a:t>
             </a:r>
           </a:p>
         </p:txBody>
@@ -4756,7 +5072,67 @@
                   <a:srgbClr val="22282E"/>
                 </a:solidFill>
               </a:rPr>
-              <a:t>•  Implementa un contenedor cifrado de archivos con AES-GCM que incluya en el AAD metadatos (nombre y versión) y verifique integridad al abrir. Criterio de aceptación: el archivo se descifra solo con el nonce, la clave y el AAD correctos; cualquier alteración del contenido cifrado o de los metadatos provoca rechazo con InvalidTag, sin exponer datos.</a:t>
+              <a:t>•  AES-GCM con AAD en Python:</a:t>
+            </a:r>
+          </a:p>
+          <a:p>
+            <a:pPr>
+              <a:spcAft>
+                <a:spcPts val="600"/>
+              </a:spcAft>
+            </a:pPr>
+            <a:r>
+              <a:rPr sz="1500">
+                <a:solidFill>
+                  <a:srgbClr val="22282E"/>
+                </a:solidFill>
+              </a:rPr>
+              <a:t>•  Detecta manipulación. Cambia un byte de ct o del aad y llama a decrypt: se lanza InvalidTag. Concluye que AEAD falla cerrado.</a:t>
+            </a:r>
+          </a:p>
+          <a:p>
+            <a:pPr>
+              <a:spcAft>
+                <a:spcPts val="600"/>
+              </a:spcAft>
+            </a:pPr>
+            <a:r>
+              <a:rPr sz="1500">
+                <a:solidFill>
+                  <a:srgbClr val="22282E"/>
+                </a:solidFill>
+              </a:rPr>
+              <a:t>•  ChaCha20-Poly1305: repite el ejercicio con ChaCha20Poly1305 y compara la API idéntica.</a:t>
+            </a:r>
+          </a:p>
+          <a:p>
+            <a:pPr>
+              <a:spcAft>
+                <a:spcPts val="600"/>
+              </a:spcAft>
+            </a:pPr>
+            <a:r>
+              <a:rPr sz="1500">
+                <a:solidFill>
+                  <a:srgbClr val="22282E"/>
+                </a:solidFill>
+              </a:rPr>
+              <a:t>•  Nonce reutilizado en GCM (concepto y demo controlada). Cifra dos mensajes con el mismo nonce y clave; explica por qué esto permite recuperar el keystream (XOR de textos) y, peor aún, forjar tags…</a:t>
+            </a:r>
+          </a:p>
+          <a:p>
+            <a:pPr>
+              <a:spcAft>
+                <a:spcPts val="600"/>
+              </a:spcAft>
+            </a:pPr>
+            <a:r>
+              <a:rPr sz="1500">
+                <a:solidFill>
+                  <a:srgbClr val="22282E"/>
+                </a:solidFill>
+              </a:rPr>
+              <a:t>•  Migra de CBC+HMAC a AEAD. Toma el ejercicio de la clase 052 y sustitúyelo por AES-GCM; observa la simplificación y menor superficie de error.</a:t>
             </a:r>
           </a:p>
         </p:txBody>
